--- a/20260905/slides/0912_하네스데모.pptx
+++ b/20260905/slides/0912_하네스데모.pptx
@@ -32,7 +32,6 @@
     <p:sldId id="280" r:id="rId31"/>
     <p:sldId id="281" r:id="rId32"/>
     <p:sldId id="282" r:id="rId33"/>
-    <p:sldId id="283" r:id="rId34"/>
   </p:sldIdLst>
   <p:sldSz cx="12191695" cy="6858000" type="screen4x3"/>
   <p:notesSz cx="6858000" cy="9144000"/>
@@ -3145,7 +3144,7 @@
                 </a:solidFill>
                 <a:latin typeface="Malgun Gothic"/>
               </a:rPr>
-              <a:t>1/28</a:t>
+              <a:t>1/27</a:t>
             </a:r>
           </a:p>
         </p:txBody>
@@ -3520,7 +3519,7 @@
                 </a:solidFill>
                 <a:latin typeface="Malgun Gothic"/>
               </a:rPr>
-              <a:t>10/28</a:t>
+              <a:t>10/27</a:t>
             </a:r>
           </a:p>
         </p:txBody>
@@ -3778,7 +3777,7 @@
                 </a:solidFill>
                 <a:latin typeface="Malgun Gothic"/>
               </a:rPr>
-              <a:t>11/28</a:t>
+              <a:t>11/27</a:t>
             </a:r>
           </a:p>
         </p:txBody>
@@ -4513,7 +4512,7 @@
                 </a:solidFill>
                 <a:latin typeface="Malgun Gothic"/>
               </a:rPr>
-              <a:t>12/28</a:t>
+              <a:t>12/27</a:t>
             </a:r>
           </a:p>
         </p:txBody>
@@ -5232,7 +5231,7 @@
                 </a:solidFill>
                 <a:latin typeface="Malgun Gothic"/>
               </a:rPr>
-              <a:t>13/28</a:t>
+              <a:t>13/27</a:t>
             </a:r>
           </a:p>
         </p:txBody>
@@ -5967,7 +5966,7 @@
                 </a:solidFill>
                 <a:latin typeface="Malgun Gothic"/>
               </a:rPr>
-              <a:t>14/28</a:t>
+              <a:t>14/27</a:t>
             </a:r>
           </a:p>
         </p:txBody>
@@ -6695,7 +6694,7 @@
                 </a:solidFill>
                 <a:latin typeface="Malgun Gothic"/>
               </a:rPr>
-              <a:t>15/28</a:t>
+              <a:t>15/27</a:t>
             </a:r>
           </a:p>
         </p:txBody>
@@ -7484,7 +7483,7 @@
                 </a:solidFill>
                 <a:latin typeface="Malgun Gothic"/>
               </a:rPr>
-              <a:t>16/28</a:t>
+              <a:t>16/27</a:t>
             </a:r>
           </a:p>
         </p:txBody>
@@ -8861,131 +8860,7 @@
       </p:sp>
       <p:sp>
         <p:nvSpPr>
-          <p:cNvPr id="32" name="Rounded Rectangle 31"/>
-          <p:cNvSpPr/>
-          <p:nvPr/>
-        </p:nvSpPr>
-        <p:spPr>
-          <a:xfrm>
-            <a:off x="777240" y="5806440"/>
-            <a:ext cx="10607040" cy="548640"/>
-          </a:xfrm>
-          <a:prstGeom prst="roundRect">
-            <a:avLst/>
-          </a:prstGeom>
-          <a:solidFill>
-            <a:srgbClr val="F0F4F8"/>
-          </a:solidFill>
-          <a:ln w="12700">
-            <a:solidFill>
-              <a:srgbClr val="1F5C99"/>
-            </a:solidFill>
-          </a:ln>
-          <a:effectLst/>
-        </p:spPr>
-        <p:style>
-          <a:lnRef idx="1">
-            <a:schemeClr val="accent1"/>
-          </a:lnRef>
-          <a:fillRef idx="3">
-            <a:schemeClr val="accent1"/>
-          </a:fillRef>
-          <a:effectRef idx="2">
-            <a:schemeClr val="accent1"/>
-          </a:effectRef>
-          <a:fontRef idx="minor">
-            <a:schemeClr val="lt1"/>
-          </a:fontRef>
-        </p:style>
-        <p:txBody>
-          <a:bodyPr rtlCol="0" anchor="ctr"/>
-          <a:lstStyle/>
-          <a:p>
-            <a:pPr algn="ctr"/>
-          </a:p>
-        </p:txBody>
-      </p:sp>
-      <p:sp>
-        <p:nvSpPr>
-          <p:cNvPr id="33" name="TextBox 32"/>
-          <p:cNvSpPr txBox="1"/>
-          <p:nvPr/>
-        </p:nvSpPr>
-        <p:spPr>
-          <a:xfrm>
-            <a:off x="941832" y="5824727"/>
-            <a:ext cx="822960" cy="512064"/>
-          </a:xfrm>
-          <a:prstGeom prst="rect">
-            <a:avLst/>
-          </a:prstGeom>
-          <a:noFill/>
-        </p:spPr>
-        <p:txBody>
-          <a:bodyPr wrap="square" anchor="ctr">
-            <a:spAutoFit/>
-          </a:bodyPr>
-          <a:lstStyle/>
-          <a:p>
-            <a:pPr algn="l">
-              <a:spcAft>
-                <a:spcPts val="300"/>
-              </a:spcAft>
-            </a:pPr>
-            <a:r>
-              <a:rPr sz="1000" b="1" i="0">
-                <a:solidFill>
-                  <a:srgbClr val="1F5C99"/>
-                </a:solidFill>
-                <a:latin typeface="Malgun Gothic"/>
-              </a:rPr>
-              <a:t>+심화</a:t>
-            </a:r>
-          </a:p>
-        </p:txBody>
-      </p:sp>
-      <p:sp>
-        <p:nvSpPr>
-          <p:cNvPr id="34" name="TextBox 33"/>
-          <p:cNvSpPr txBox="1"/>
-          <p:nvPr/>
-        </p:nvSpPr>
-        <p:spPr>
-          <a:xfrm>
-            <a:off x="1828800" y="5824727"/>
-            <a:ext cx="9418319" cy="512064"/>
-          </a:xfrm>
-          <a:prstGeom prst="rect">
-            <a:avLst/>
-          </a:prstGeom>
-          <a:noFill/>
-        </p:spPr>
-        <p:txBody>
-          <a:bodyPr wrap="square" anchor="ctr">
-            <a:spAutoFit/>
-          </a:bodyPr>
-          <a:lstStyle/>
-          <a:p>
-            <a:pPr algn="l">
-              <a:spcAft>
-                <a:spcPts val="300"/>
-              </a:spcAft>
-            </a:pPr>
-            <a:r>
-              <a:rPr sz="1000" b="0" i="0">
-                <a:solidFill>
-                  <a:srgbClr val="5A636B"/>
-                </a:solidFill>
-                <a:latin typeface="Malgun Gothic"/>
-              </a:rPr>
-              <a:t>기본 데모에서 docking.py 는 '미실행'을 반환한다. 이것이 버그가 아니라 설계다 — 실행 못 한 계산의 결과를 지어내지 않는다.</a:t>
-            </a:r>
-          </a:p>
-        </p:txBody>
-      </p:sp>
-      <p:sp>
-        <p:nvSpPr>
-          <p:cNvPr id="35" name="TextBox 34"/>
+          <p:cNvPr id="32" name="TextBox 31"/>
           <p:cNvSpPr txBox="1"/>
           <p:nvPr/>
         </p:nvSpPr>
@@ -9079,7 +8954,7 @@
                 </a:solidFill>
                 <a:latin typeface="Malgun Gothic"/>
               </a:rPr>
-              <a:t>17/28</a:t>
+              <a:t>17/27</a:t>
             </a:r>
           </a:p>
         </p:txBody>
@@ -9337,7 +9212,7 @@
                 </a:solidFill>
                 <a:latin typeface="Malgun Gothic"/>
               </a:rPr>
-              <a:t>18/28</a:t>
+              <a:t>18/27</a:t>
             </a:r>
           </a:p>
         </p:txBody>
@@ -10592,7 +10467,7 @@
                 </a:solidFill>
                 <a:latin typeface="Malgun Gothic"/>
               </a:rPr>
-              <a:t>19/28</a:t>
+              <a:t>19/27</a:t>
             </a:r>
           </a:p>
         </p:txBody>
@@ -11104,131 +10979,7 @@
       </p:sp>
       <p:sp>
         <p:nvSpPr>
-          <p:cNvPr id="12" name="Rounded Rectangle 11"/>
-          <p:cNvSpPr/>
-          <p:nvPr/>
-        </p:nvSpPr>
-        <p:spPr>
-          <a:xfrm>
-            <a:off x="777240" y="5806440"/>
-            <a:ext cx="10607040" cy="548640"/>
-          </a:xfrm>
-          <a:prstGeom prst="roundRect">
-            <a:avLst/>
-          </a:prstGeom>
-          <a:solidFill>
-            <a:srgbClr val="F0F4F8"/>
-          </a:solidFill>
-          <a:ln w="12700">
-            <a:solidFill>
-              <a:srgbClr val="1F5C99"/>
-            </a:solidFill>
-          </a:ln>
-          <a:effectLst/>
-        </p:spPr>
-        <p:style>
-          <a:lnRef idx="1">
-            <a:schemeClr val="accent1"/>
-          </a:lnRef>
-          <a:fillRef idx="3">
-            <a:schemeClr val="accent1"/>
-          </a:fillRef>
-          <a:effectRef idx="2">
-            <a:schemeClr val="accent1"/>
-          </a:effectRef>
-          <a:fontRef idx="minor">
-            <a:schemeClr val="lt1"/>
-          </a:fontRef>
-        </p:style>
-        <p:txBody>
-          <a:bodyPr rtlCol="0" anchor="ctr"/>
-          <a:lstStyle/>
-          <a:p>
-            <a:pPr algn="ctr"/>
-          </a:p>
-        </p:txBody>
-      </p:sp>
-      <p:sp>
-        <p:nvSpPr>
-          <p:cNvPr id="13" name="TextBox 12"/>
-          <p:cNvSpPr txBox="1"/>
-          <p:nvPr/>
-        </p:nvSpPr>
-        <p:spPr>
-          <a:xfrm>
-            <a:off x="941832" y="5824727"/>
-            <a:ext cx="822960" cy="512064"/>
-          </a:xfrm>
-          <a:prstGeom prst="rect">
-            <a:avLst/>
-          </a:prstGeom>
-          <a:noFill/>
-        </p:spPr>
-        <p:txBody>
-          <a:bodyPr wrap="square" anchor="ctr">
-            <a:spAutoFit/>
-          </a:bodyPr>
-          <a:lstStyle/>
-          <a:p>
-            <a:pPr algn="l">
-              <a:spcAft>
-                <a:spcPts val="300"/>
-              </a:spcAft>
-            </a:pPr>
-            <a:r>
-              <a:rPr sz="1000" b="1" i="0">
-                <a:solidFill>
-                  <a:srgbClr val="1F5C99"/>
-                </a:solidFill>
-                <a:latin typeface="Malgun Gothic"/>
-              </a:rPr>
-              <a:t>+심화</a:t>
-            </a:r>
-          </a:p>
-        </p:txBody>
-      </p:sp>
-      <p:sp>
-        <p:nvSpPr>
-          <p:cNvPr id="14" name="TextBox 13"/>
-          <p:cNvSpPr txBox="1"/>
-          <p:nvPr/>
-        </p:nvSpPr>
-        <p:spPr>
-          <a:xfrm>
-            <a:off x="1828800" y="5824727"/>
-            <a:ext cx="9418319" cy="512064"/>
-          </a:xfrm>
-          <a:prstGeom prst="rect">
-            <a:avLst/>
-          </a:prstGeom>
-          <a:noFill/>
-        </p:spPr>
-        <p:txBody>
-          <a:bodyPr wrap="square" anchor="ctr">
-            <a:spAutoFit/>
-          </a:bodyPr>
-          <a:lstStyle/>
-          <a:p>
-            <a:pPr algn="l">
-              <a:spcAft>
-                <a:spcPts val="300"/>
-              </a:spcAft>
-            </a:pPr>
-            <a:r>
-              <a:rPr sz="1000" b="0" i="0">
-                <a:solidFill>
-                  <a:srgbClr val="5A636B"/>
-                </a:solidFill>
-                <a:latin typeface="Malgun Gothic"/>
-              </a:rPr>
-              <a:t>selectivity.py 가 정량 fold-selectivity 를 '안 내는' 것도 같은 원칙이다. 모르는 것을 모른다고 하는 것이 이 하네스의 유일한 성공 조건에 가깝다.</a:t>
-            </a:r>
-          </a:p>
-        </p:txBody>
-      </p:sp>
-      <p:sp>
-        <p:nvSpPr>
-          <p:cNvPr id="15" name="TextBox 14"/>
+          <p:cNvPr id="12" name="TextBox 11"/>
           <p:cNvSpPr txBox="1"/>
           <p:nvPr/>
         </p:nvSpPr>
@@ -11322,7 +11073,7 @@
                 </a:solidFill>
                 <a:latin typeface="Malgun Gothic"/>
               </a:rPr>
-              <a:t>2/28</a:t>
+              <a:t>2/27</a:t>
             </a:r>
           </a:p>
         </p:txBody>
@@ -12035,7 +11786,7 @@
                 </a:solidFill>
                 <a:latin typeface="Malgun Gothic"/>
               </a:rPr>
-              <a:t>20/28</a:t>
+              <a:t>20/27</a:t>
             </a:r>
           </a:p>
         </p:txBody>
@@ -12877,7 +12628,7 @@
                 </a:solidFill>
                 <a:latin typeface="Malgun Gothic"/>
               </a:rPr>
-              <a:t>21/28</a:t>
+              <a:t>21/27</a:t>
             </a:r>
           </a:p>
         </p:txBody>
@@ -14274,7 +14025,7 @@
                 </a:solidFill>
                 <a:latin typeface="Malgun Gothic"/>
               </a:rPr>
-              <a:t>22/28</a:t>
+              <a:t>22/27</a:t>
             </a:r>
           </a:p>
         </p:txBody>
@@ -14937,7 +14688,7 @@
                 </a:solidFill>
                 <a:latin typeface="Malgun Gothic"/>
               </a:rPr>
-              <a:t>23/28</a:t>
+              <a:t>23/27</a:t>
             </a:r>
           </a:p>
         </p:txBody>
@@ -15779,7 +15530,7 @@
                 </a:solidFill>
                 <a:latin typeface="Malgun Gothic"/>
               </a:rPr>
-              <a:t>24/28</a:t>
+              <a:t>24/27</a:t>
             </a:r>
           </a:p>
         </p:txBody>
@@ -17374,7 +17125,7 @@
                 </a:solidFill>
                 <a:latin typeface="Malgun Gothic"/>
               </a:rPr>
-              <a:t>25/28</a:t>
+              <a:t>25/27</a:t>
             </a:r>
           </a:p>
         </p:txBody>
@@ -18315,7 +18066,7 @@
                 </a:solidFill>
                 <a:latin typeface="Malgun Gothic"/>
               </a:rPr>
-              <a:t>26/28</a:t>
+              <a:t>26/27</a:t>
             </a:r>
           </a:p>
         </p:txBody>
@@ -19811,7 +19562,7 @@
                 </a:solidFill>
                 <a:latin typeface="Malgun Gothic"/>
               </a:rPr>
-              <a:t>27/28</a:t>
+              <a:t>27/27</a:t>
             </a:r>
           </a:p>
         </p:txBody>
@@ -19946,7 +19697,7 @@
         </p:nvSpPr>
         <p:spPr>
           <a:xfrm>
-            <a:off x="822960" y="1783080"/>
+            <a:off x="822960" y="1691640"/>
             <a:ext cx="502920" cy="502920"/>
           </a:xfrm>
           <a:prstGeom prst="ellipse">
@@ -19990,7 +19741,7 @@
         </p:nvSpPr>
         <p:spPr>
           <a:xfrm>
-            <a:off x="822960" y="1783080"/>
+            <a:off x="822960" y="1691640"/>
             <a:ext cx="502920" cy="502920"/>
           </a:xfrm>
           <a:prstGeom prst="rect">
@@ -20029,8 +19780,8 @@
         </p:nvSpPr>
         <p:spPr>
           <a:xfrm>
-            <a:off x="1554480" y="1764792"/>
-            <a:ext cx="10058400" cy="868680"/>
+            <a:off x="1554480" y="1673352"/>
+            <a:ext cx="10058400" cy="786384"/>
           </a:xfrm>
           <a:prstGeom prst="rect">
             <a:avLst/>
@@ -20084,7 +19835,7 @@
         </p:nvSpPr>
         <p:spPr>
           <a:xfrm>
-            <a:off x="822960" y="2697480"/>
+            <a:off x="822960" y="2496312"/>
             <a:ext cx="502920" cy="502920"/>
           </a:xfrm>
           <a:prstGeom prst="ellipse">
@@ -20128,7 +19879,7 @@
         </p:nvSpPr>
         <p:spPr>
           <a:xfrm>
-            <a:off x="822960" y="2697480"/>
+            <a:off x="822960" y="2496312"/>
             <a:ext cx="502920" cy="502920"/>
           </a:xfrm>
           <a:prstGeom prst="rect">
@@ -20167,8 +19918,8 @@
         </p:nvSpPr>
         <p:spPr>
           <a:xfrm>
-            <a:off x="1554480" y="2679192"/>
-            <a:ext cx="10058400" cy="868680"/>
+            <a:off x="1554480" y="2478024"/>
+            <a:ext cx="10058400" cy="786384"/>
           </a:xfrm>
           <a:prstGeom prst="rect">
             <a:avLst/>
@@ -20222,7 +19973,7 @@
         </p:nvSpPr>
         <p:spPr>
           <a:xfrm>
-            <a:off x="822960" y="3611880"/>
+            <a:off x="822960" y="3300984"/>
             <a:ext cx="502920" cy="502920"/>
           </a:xfrm>
           <a:prstGeom prst="ellipse">
@@ -20266,7 +20017,7 @@
         </p:nvSpPr>
         <p:spPr>
           <a:xfrm>
-            <a:off x="822960" y="3611880"/>
+            <a:off x="822960" y="3300984"/>
             <a:ext cx="502920" cy="502920"/>
           </a:xfrm>
           <a:prstGeom prst="rect">
@@ -20305,8 +20056,8 @@
         </p:nvSpPr>
         <p:spPr>
           <a:xfrm>
-            <a:off x="1554480" y="3593592"/>
-            <a:ext cx="10058400" cy="868680"/>
+            <a:off x="1554480" y="3282696"/>
+            <a:ext cx="10058400" cy="786384"/>
           </a:xfrm>
           <a:prstGeom prst="rect">
             <a:avLst/>
@@ -20360,7 +20111,7 @@
         </p:nvSpPr>
         <p:spPr>
           <a:xfrm>
-            <a:off x="822960" y="4526280"/>
+            <a:off x="822960" y="4105656"/>
             <a:ext cx="502920" cy="502920"/>
           </a:xfrm>
           <a:prstGeom prst="ellipse">
@@ -20404,7 +20155,7 @@
         </p:nvSpPr>
         <p:spPr>
           <a:xfrm>
-            <a:off x="822960" y="4526280"/>
+            <a:off x="822960" y="4105656"/>
             <a:ext cx="502920" cy="502920"/>
           </a:xfrm>
           <a:prstGeom prst="rect">
@@ -20443,8 +20194,8 @@
         </p:nvSpPr>
         <p:spPr>
           <a:xfrm>
-            <a:off x="1554480" y="4507992"/>
-            <a:ext cx="10058400" cy="868680"/>
+            <a:off x="1554480" y="4087368"/>
+            <a:ext cx="10058400" cy="786384"/>
           </a:xfrm>
           <a:prstGeom prst="rect">
             <a:avLst/>
@@ -20498,7 +20249,7 @@
         </p:nvSpPr>
         <p:spPr>
           <a:xfrm>
-            <a:off x="822960" y="5440680"/>
+            <a:off x="822960" y="4910328"/>
             <a:ext cx="502920" cy="502920"/>
           </a:xfrm>
           <a:prstGeom prst="ellipse">
@@ -20542,7 +20293,7 @@
         </p:nvSpPr>
         <p:spPr>
           <a:xfrm>
-            <a:off x="822960" y="5440680"/>
+            <a:off x="822960" y="4910328"/>
             <a:ext cx="502920" cy="502920"/>
           </a:xfrm>
           <a:prstGeom prst="rect">
@@ -20581,8 +20332,8 @@
         </p:nvSpPr>
         <p:spPr>
           <a:xfrm>
-            <a:off x="1554480" y="5422392"/>
-            <a:ext cx="10058400" cy="868680"/>
+            <a:off x="1554480" y="4892040"/>
+            <a:ext cx="10058400" cy="786384"/>
           </a:xfrm>
           <a:prstGeom prst="rect">
             <a:avLst/>
@@ -20630,124 +20381,25 @@
       </p:sp>
       <p:sp>
         <p:nvSpPr>
-          <p:cNvPr id="21" name="TextBox 20"/>
-          <p:cNvSpPr txBox="1"/>
-          <p:nvPr/>
-        </p:nvSpPr>
-        <p:spPr>
-          <a:xfrm>
-            <a:off x="548640" y="6455664"/>
-            <a:ext cx="10607040" cy="310896"/>
-          </a:xfrm>
-          <a:prstGeom prst="rect">
-            <a:avLst/>
-          </a:prstGeom>
-          <a:noFill/>
-        </p:spPr>
-        <p:txBody>
-          <a:bodyPr wrap="square" anchor="t">
-            <a:spAutoFit/>
-          </a:bodyPr>
-          <a:lstStyle/>
-          <a:p>
-            <a:pPr algn="l">
-              <a:spcAft>
-                <a:spcPts val="300"/>
-              </a:spcAft>
-            </a:pPr>
-            <a:r>
-              <a:rPr sz="850" b="1" i="0">
-                <a:solidFill>
-                  <a:srgbClr val="009CD8"/>
-                </a:solidFill>
-                <a:latin typeface="Malgun Gothic"/>
-              </a:rPr>
-              <a:t>Ref. </a:t>
-            </a:r>
-            <a:r>
-              <a:rPr sz="850" b="0" i="0">
-                <a:solidFill>
-                  <a:srgbClr val="5A636B"/>
-                </a:solidFill>
-                <a:latin typeface="Malgun Gothic"/>
-              </a:rPr>
-              <a:t>0905_agent/pde5_harness/ — 실제 코드·실행 결과 인용</a:t>
-            </a:r>
-          </a:p>
-        </p:txBody>
-      </p:sp>
-    </p:spTree>
-  </p:cSld>
-  <p:clrMapOvr>
-    <a:masterClrMapping/>
-  </p:clrMapOvr>
-</p:sld>
-</file>
-
-<file path=ppt/slides/slide28.xml><?xml version="1.0" encoding="utf-8"?>
-<p:sld xmlns:a="http://schemas.openxmlformats.org/drawingml/2006/main" xmlns:p="http://schemas.openxmlformats.org/presentationml/2006/main" xmlns:r="http://schemas.openxmlformats.org/officeDocument/2006/relationships">
-  <p:cSld>
-    <p:spTree>
-      <p:nvGrpSpPr>
-        <p:cNvPr id="1" name=""/>
-        <p:cNvGrpSpPr/>
-        <p:nvPr/>
-      </p:nvGrpSpPr>
-      <p:grpSpPr/>
-      <p:sp>
-        <p:nvSpPr>
-          <p:cNvPr id="2" name="TextBox 1"/>
-          <p:cNvSpPr txBox="1"/>
-          <p:nvPr/>
-        </p:nvSpPr>
-        <p:spPr>
-          <a:xfrm>
-            <a:off x="11292840" y="6455664"/>
-            <a:ext cx="777240" cy="274320"/>
-          </a:xfrm>
-          <a:prstGeom prst="rect">
-            <a:avLst/>
-          </a:prstGeom>
-          <a:noFill/>
-        </p:spPr>
-        <p:txBody>
-          <a:bodyPr wrap="none">
-            <a:spAutoFit/>
-          </a:bodyPr>
-          <a:lstStyle/>
-          <a:p>
-            <a:pPr algn="r"/>
-            <a:r>
-              <a:rPr sz="900">
-                <a:solidFill>
-                  <a:srgbClr val="5A636B"/>
-                </a:solidFill>
-                <a:latin typeface="Malgun Gothic"/>
-              </a:rPr>
-              <a:t>28/28</a:t>
-            </a:r>
-          </a:p>
-        </p:txBody>
-      </p:sp>
-      <p:sp>
-        <p:nvSpPr>
-          <p:cNvPr id="3" name="Rectangle 2"/>
+          <p:cNvPr id="21" name="Rounded Rectangle 20"/>
           <p:cNvSpPr/>
           <p:nvPr/>
         </p:nvSpPr>
         <p:spPr>
           <a:xfrm>
-            <a:off x="-91440" y="-91440"/>
-            <a:ext cx="12435840" cy="7040880"/>
-          </a:xfrm>
-          <a:prstGeom prst="rect">
+            <a:off x="777240" y="5833872"/>
+            <a:ext cx="10607040" cy="548640"/>
+          </a:xfrm>
+          <a:prstGeom prst="roundRect">
             <a:avLst/>
           </a:prstGeom>
           <a:solidFill>
-            <a:srgbClr val="0B2A4A"/>
+            <a:srgbClr val="EAF6F2"/>
           </a:solidFill>
-          <a:ln>
-            <a:noFill/>
+          <a:ln w="12700">
+            <a:solidFill>
+              <a:srgbClr val="1AA68C"/>
+            </a:solidFill>
           </a:ln>
           <a:effectLst/>
         </p:spPr>
@@ -20775,58 +20427,92 @@
       </p:sp>
       <p:sp>
         <p:nvSpPr>
-          <p:cNvPr id="4" name="Rectangle 3"/>
-          <p:cNvSpPr/>
-          <p:nvPr/>
-        </p:nvSpPr>
-        <p:spPr>
-          <a:xfrm>
-            <a:off x="0" y="0"/>
-            <a:ext cx="274320" cy="6858000"/>
-          </a:xfrm>
-          <a:prstGeom prst="rect">
-            <a:avLst/>
-          </a:prstGeom>
-          <a:solidFill>
-            <a:srgbClr val="1AA68C"/>
-          </a:solidFill>
-          <a:ln>
-            <a:noFill/>
-          </a:ln>
-          <a:effectLst/>
-        </p:spPr>
-        <p:style>
-          <a:lnRef idx="1">
-            <a:schemeClr val="accent1"/>
-          </a:lnRef>
-          <a:fillRef idx="3">
-            <a:schemeClr val="accent1"/>
-          </a:fillRef>
-          <a:effectRef idx="2">
-            <a:schemeClr val="accent1"/>
-          </a:effectRef>
-          <a:fontRef idx="minor">
-            <a:schemeClr val="lt1"/>
-          </a:fontRef>
-        </p:style>
-        <p:txBody>
-          <a:bodyPr rtlCol="0" anchor="ctr"/>
-          <a:lstStyle/>
-          <a:p>
-            <a:pPr algn="ctr"/>
-          </a:p>
-        </p:txBody>
-      </p:sp>
-      <p:sp>
-        <p:nvSpPr>
-          <p:cNvPr id="5" name="TextBox 4"/>
-          <p:cNvSpPr txBox="1"/>
-          <p:nvPr/>
-        </p:nvSpPr>
-        <p:spPr>
-          <a:xfrm>
-            <a:off x="1005840" y="1920240"/>
-            <a:ext cx="10058400" cy="548640"/>
+          <p:cNvPr id="22" name="TextBox 21"/>
+          <p:cNvSpPr txBox="1"/>
+          <p:nvPr/>
+        </p:nvSpPr>
+        <p:spPr>
+          <a:xfrm>
+            <a:off x="941832" y="5852159"/>
+            <a:ext cx="1371600" cy="512064"/>
+          </a:xfrm>
+          <a:prstGeom prst="rect">
+            <a:avLst/>
+          </a:prstGeom>
+          <a:noFill/>
+        </p:spPr>
+        <p:txBody>
+          <a:bodyPr wrap="square" anchor="ctr">
+            <a:spAutoFit/>
+          </a:bodyPr>
+          <a:lstStyle/>
+          <a:p>
+            <a:pPr algn="l">
+              <a:spcAft>
+                <a:spcPts val="300"/>
+              </a:spcAft>
+            </a:pPr>
+            <a:r>
+              <a:rPr sz="1000" b="1" i="0">
+                <a:solidFill>
+                  <a:srgbClr val="1AA68C"/>
+                </a:solidFill>
+                <a:latin typeface="Malgun Gothic"/>
+              </a:rPr>
+              <a:t>쉽게</a:t>
+            </a:r>
+          </a:p>
+        </p:txBody>
+      </p:sp>
+      <p:sp>
+        <p:nvSpPr>
+          <p:cNvPr id="23" name="TextBox 22"/>
+          <p:cNvSpPr txBox="1"/>
+          <p:nvPr/>
+        </p:nvSpPr>
+        <p:spPr>
+          <a:xfrm>
+            <a:off x="2194560" y="5852159"/>
+            <a:ext cx="9052560" cy="512064"/>
+          </a:xfrm>
+          <a:prstGeom prst="rect">
+            <a:avLst/>
+          </a:prstGeom>
+          <a:noFill/>
+        </p:spPr>
+        <p:txBody>
+          <a:bodyPr wrap="square" anchor="ctr">
+            <a:spAutoFit/>
+          </a:bodyPr>
+          <a:lstStyle/>
+          <a:p>
+            <a:pPr algn="l">
+              <a:spcAft>
+                <a:spcPts val="300"/>
+              </a:spcAft>
+            </a:pPr>
+            <a:r>
+              <a:rPr sz="1000" b="0" i="0">
+                <a:solidFill>
+                  <a:srgbClr val="5A636B"/>
+                </a:solidFill>
+                <a:latin typeface="Malgun Gothic"/>
+              </a:rPr>
+              <a:t>먼저 해볼 것: run_harness.py check → 자연어 한 줄 → 화면 지켜보기. 다음은 같은 뼈대·다른 표적 — antibody_harness/ (antigen_lookup → antibody_search → cdr_analysis → developability → humanness, HER2/P04626).</a:t>
+            </a:r>
+          </a:p>
+        </p:txBody>
+      </p:sp>
+      <p:sp>
+        <p:nvSpPr>
+          <p:cNvPr id="24" name="TextBox 23"/>
+          <p:cNvSpPr txBox="1"/>
+          <p:nvPr/>
+        </p:nvSpPr>
+        <p:spPr>
+          <a:xfrm>
+            <a:off x="548640" y="6455664"/>
+            <a:ext cx="10607040" cy="310896"/>
           </a:xfrm>
           <a:prstGeom prst="rect">
             <a:avLst/>
@@ -20845,178 +20531,22 @@
               </a:spcAft>
             </a:pPr>
             <a:r>
-              <a:rPr sz="1600" b="1" i="0">
+              <a:rPr sz="850" b="1" i="0">
                 <a:solidFill>
                   <a:srgbClr val="009CD8"/>
                 </a:solidFill>
                 <a:latin typeface="Malgun Gothic"/>
               </a:rPr>
-              <a:t>다음</a:t>
-            </a:r>
-          </a:p>
-        </p:txBody>
-      </p:sp>
-      <p:sp>
-        <p:nvSpPr>
-          <p:cNvPr id="6" name="TextBox 5"/>
-          <p:cNvSpPr txBox="1"/>
-          <p:nvPr/>
-        </p:nvSpPr>
-        <p:spPr>
-          <a:xfrm>
-            <a:off x="1005840" y="2606040"/>
-            <a:ext cx="10241280" cy="1097280"/>
-          </a:xfrm>
-          <a:prstGeom prst="rect">
-            <a:avLst/>
-          </a:prstGeom>
-          <a:noFill/>
-        </p:spPr>
-        <p:txBody>
-          <a:bodyPr wrap="square" anchor="t">
-            <a:spAutoFit/>
-          </a:bodyPr>
-          <a:lstStyle/>
-          <a:p>
-            <a:pPr algn="l">
-              <a:spcAft>
-                <a:spcPts val="300"/>
-              </a:spcAft>
-            </a:pPr>
-            <a:r>
-              <a:rPr sz="2600" b="1" i="0">
-                <a:solidFill>
-                  <a:srgbClr val="FFFFFF"/>
-                </a:solidFill>
-                <a:latin typeface="Malgun Gothic"/>
-              </a:rPr>
-              <a:t>같은 뼈대, 다른 표적 — 항체 설계 하네스</a:t>
-            </a:r>
-          </a:p>
-        </p:txBody>
-      </p:sp>
-      <p:sp>
-        <p:nvSpPr>
-          <p:cNvPr id="7" name="TextBox 6"/>
-          <p:cNvSpPr txBox="1"/>
-          <p:nvPr/>
-        </p:nvSpPr>
-        <p:spPr>
-          <a:xfrm>
-            <a:off x="1005840" y="3703320"/>
-            <a:ext cx="10241280" cy="1463040"/>
-          </a:xfrm>
-          <a:prstGeom prst="rect">
-            <a:avLst/>
-          </a:prstGeom>
-          <a:noFill/>
-        </p:spPr>
-        <p:txBody>
-          <a:bodyPr wrap="square" anchor="t">
-            <a:spAutoFit/>
-          </a:bodyPr>
-          <a:lstStyle/>
-          <a:p>
-            <a:pPr algn="l">
-              <a:spcAft>
-                <a:spcPts val="300"/>
-              </a:spcAft>
-            </a:pPr>
-            <a:r>
-              <a:rPr sz="1400" b="0" i="0">
-                <a:solidFill>
-                  <a:srgbClr val="E9EDF1"/>
-                </a:solidFill>
-                <a:latin typeface="Malgun Gothic"/>
-              </a:rPr>
-              <a:t>antibody_harness/ — antigen_lookup → antibody_search → cdr_analysis</a:t>
-            </a:r>
-          </a:p>
-          <a:p>
-            <a:pPr algn="l">
-              <a:spcAft>
-                <a:spcPts val="300"/>
-              </a:spcAft>
-            </a:pPr>
-            <a:r>
-              <a:rPr sz="1400" b="0" i="0">
-                <a:solidFill>
-                  <a:srgbClr val="E9EDF1"/>
-                </a:solidFill>
-                <a:latin typeface="Malgun Gothic"/>
-              </a:rPr>
-              <a:t>→ developability → humanness (기본 표적 HER2, UniProt P04626)</a:t>
-            </a:r>
-          </a:p>
-          <a:p>
-            <a:pPr algn="l">
-              <a:spcAft>
-                <a:spcPts val="300"/>
-              </a:spcAft>
-            </a:pPr>
-            <a:r>
-              <a:rPr sz="800" b="0" i="0">
-                <a:solidFill>
-                  <a:srgbClr val="FFFFFF"/>
-                </a:solidFill>
-                <a:latin typeface="Malgun Gothic"/>
-              </a:rPr>
-              <a:t/>
-            </a:r>
-          </a:p>
-          <a:p>
-            <a:pPr algn="l">
-              <a:spcAft>
-                <a:spcPts val="300"/>
-              </a:spcAft>
-            </a:pPr>
-            <a:r>
-              <a:rPr sz="1300" b="1" i="0">
-                <a:solidFill>
-                  <a:srgbClr val="009CD8"/>
-                </a:solidFill>
-                <a:latin typeface="Malgun Gothic"/>
-              </a:rPr>
-              <a:t>소분자에서 바이오로직스로 바뀌어도 계약·게이트·무-날조 구조는 그대로다.</a:t>
-            </a:r>
-          </a:p>
-        </p:txBody>
-      </p:sp>
-      <p:sp>
-        <p:nvSpPr>
-          <p:cNvPr id="8" name="TextBox 7"/>
-          <p:cNvSpPr txBox="1"/>
-          <p:nvPr/>
-        </p:nvSpPr>
-        <p:spPr>
-          <a:xfrm>
-            <a:off x="1005840" y="5669280"/>
-            <a:ext cx="10058400" cy="457200"/>
-          </a:xfrm>
-          <a:prstGeom prst="rect">
-            <a:avLst/>
-          </a:prstGeom>
-          <a:noFill/>
-        </p:spPr>
-        <p:txBody>
-          <a:bodyPr wrap="square" anchor="t">
-            <a:spAutoFit/>
-          </a:bodyPr>
-          <a:lstStyle/>
-          <a:p>
-            <a:pPr algn="l">
-              <a:spcAft>
-                <a:spcPts val="300"/>
-              </a:spcAft>
-            </a:pPr>
-            <a:r>
-              <a:rPr sz="1200" b="0" i="0">
-                <a:solidFill>
-                  <a:srgbClr val="8A929A"/>
-                </a:solidFill>
-                <a:latin typeface="Malgun Gothic"/>
-              </a:rPr>
-              <a:t>먼저 해볼 것: run_harness.py check → 자연어 한 줄 → 화면을 지켜보기.</a:t>
+              <a:t>Ref. </a:t>
+            </a:r>
+            <a:r>
+              <a:rPr sz="850" b="0" i="0">
+                <a:solidFill>
+                  <a:srgbClr val="5A636B"/>
+                </a:solidFill>
+                <a:latin typeface="Malgun Gothic"/>
+              </a:rPr>
+              <a:t>0905_agent/pde5_harness/ — 실제 코드·실행 결과 인용</a:t>
             </a:r>
           </a:p>
         </p:txBody>
@@ -21069,7 +20599,7 @@
                 </a:solidFill>
                 <a:latin typeface="Malgun Gothic"/>
               </a:rPr>
-              <a:t>3/28</a:t>
+              <a:t>3/27</a:t>
             </a:r>
           </a:p>
         </p:txBody>
@@ -22664,7 +22194,7 @@
                 </a:solidFill>
                 <a:latin typeface="Malgun Gothic"/>
               </a:rPr>
-              <a:t>4/28</a:t>
+              <a:t>4/27</a:t>
             </a:r>
           </a:p>
         </p:txBody>
@@ -22922,7 +22452,7 @@
                 </a:solidFill>
                 <a:latin typeface="Malgun Gothic"/>
               </a:rPr>
-              <a:t>5/28</a:t>
+              <a:t>5/27</a:t>
             </a:r>
           </a:p>
         </p:txBody>
@@ -24399,7 +23929,7 @@
                 </a:solidFill>
                 <a:latin typeface="Malgun Gothic"/>
               </a:rPr>
-              <a:t>6/28</a:t>
+              <a:t>6/27</a:t>
             </a:r>
           </a:p>
         </p:txBody>
@@ -25340,7 +24870,7 @@
                 </a:solidFill>
                 <a:latin typeface="Malgun Gothic"/>
               </a:rPr>
-              <a:t>7/28</a:t>
+              <a:t>7/27</a:t>
             </a:r>
           </a:p>
         </p:txBody>
@@ -27034,7 +26564,7 @@
                 </a:solidFill>
                 <a:latin typeface="Malgun Gothic"/>
               </a:rPr>
-              <a:t>8/28</a:t>
+              <a:t>8/27</a:t>
             </a:r>
           </a:p>
         </p:txBody>
@@ -28933,7 +28463,7 @@
                 </a:solidFill>
                 <a:latin typeface="Malgun Gothic"/>
               </a:rPr>
-              <a:t>9/28</a:t>
+              <a:t>9/27</a:t>
             </a:r>
           </a:p>
         </p:txBody>
